--- a/FTAI_Pitch_Deck.pptx
+++ b/FTAI_Pitch_Deck.pptx
@@ -36,7 +36,7 @@
     <p:sldId id="284" r:id="rId36"/>
     <p:sldId id="285" r:id="rId37"/>
   </p:sldIdLst>
-  <p:sldSz cx="12191695" cy="6858000" type="screen4x3"/>
+  <p:sldSz cx="12191695" cy="6858000"/>
   <p:notesSz cx="6858000" cy="9144000"/>
   <p:defaultTextStyle>
     <a:defPPr>
@@ -293,11 +293,11 @@
           <c:showLeaderLines val="1"/>
         </c:dLbls>
         <c:gapWidth val="60"/>
-        <c:axId val="-2068027336"/>
-        <c:axId val="-2113994440"/>
+        <c:axId val="2068027336"/>
+        <c:axId val="2113994440"/>
       </c:barChart>
       <c:catAx>
-        <c:axId val="-2068027336"/>
+        <c:axId val="2068027336"/>
         <c:scaling>
           <c:orientation val="minMax"/>
         </c:scaling>
@@ -327,7 +327,7 @@
             </a:pPr>
           </a:p>
         </c:txPr>
-        <c:crossAx val="-2113994440"/>
+        <c:crossAx val="2113994440"/>
         <c:crosses val="autoZero"/>
         <c:auto val="1"/>
         <c:lblAlgn val="ctr"/>
@@ -335,7 +335,7 @@
         <c:noMultiLvlLbl val="0"/>
       </c:catAx>
       <c:valAx>
-        <c:axId val="-2113994440"/>
+        <c:axId val="2113994440"/>
         <c:scaling/>
         <c:delete/>
         <c:axPos val="l"/>
@@ -370,7 +370,7 @@
             </a:pPr>
           </a:p>
         </c:txPr>
-        <c:crossAx val="-2068027336"/>
+        <c:crossAx val="2068027336"/>
         <c:crosses val="autoZero"/>
       </c:valAx>
     </c:plotArea>
@@ -496,7 +496,6 @@
                   </a:pPr>
                 </a:p>
               </c:txPr>
-              <c:dLblPos val="ctr"/>
               <c:showLegendKey val="0"/>
               <c:showVal val="1"/>
               <c:showCatName val="0"/>
@@ -521,7 +520,6 @@
                   </a:pPr>
                 </a:p>
               </c:txPr>
-              <c:dLblPos val="ctr"/>
               <c:showLegendKey val="0"/>
               <c:showVal val="1"/>
               <c:showCatName val="0"/>
@@ -546,7 +544,6 @@
                   </a:pPr>
                 </a:p>
               </c:txPr>
-              <c:dLblPos val="ctr"/>
               <c:showLegendKey val="0"/>
               <c:showVal val="1"/>
               <c:showCatName val="0"/>
@@ -614,9 +611,8 @@
               </a:pPr>
             </a:p>
           </c:txPr>
-          <c:dLblPos val="ctr"/>
           <c:showLegendKey val="0"/>
-          <c:showVal val="0"/>
+          <c:showVal val="1"/>
           <c:showCatName val="0"/>
           <c:showSerName val="0"/>
           <c:showPercent val="0"/>
@@ -891,11 +887,11 @@
         </c:dLbls>
         <c:gapWidth val="60"/>
         <c:overlap val="100"/>
-        <c:axId val="-2068027336"/>
-        <c:axId val="-2113994440"/>
+        <c:axId val="2068027336"/>
+        <c:axId val="2113994440"/>
       </c:barChart>
       <c:catAx>
-        <c:axId val="-2068027336"/>
+        <c:axId val="2068027336"/>
         <c:scaling>
           <c:orientation val="minMax"/>
         </c:scaling>
@@ -925,7 +921,7 @@
             </a:pPr>
           </a:p>
         </c:txPr>
-        <c:crossAx val="-2113994440"/>
+        <c:crossAx val="2113994440"/>
         <c:crosses val="autoZero"/>
         <c:auto val="1"/>
         <c:lblAlgn val="ctr"/>
@@ -933,7 +929,7 @@
         <c:noMultiLvlLbl val="0"/>
       </c:catAx>
       <c:valAx>
-        <c:axId val="-2113994440"/>
+        <c:axId val="2113994440"/>
         <c:scaling/>
         <c:delete/>
         <c:axPos val="l"/>
@@ -968,7 +964,7 @@
             </a:pPr>
           </a:p>
         </c:txPr>
-        <c:crossAx val="-2068027336"/>
+        <c:crossAx val="2068027336"/>
         <c:crosses val="autoZero"/>
       </c:valAx>
     </c:plotArea>
@@ -1121,11 +1117,11 @@
           <c:showLeaderLines val="1"/>
         </c:dLbls>
         <c:gapWidth val="60"/>
-        <c:axId val="-2068027336"/>
-        <c:axId val="-2113994440"/>
+        <c:axId val="2068027336"/>
+        <c:axId val="2113994440"/>
       </c:barChart>
       <c:catAx>
-        <c:axId val="-2068027336"/>
+        <c:axId val="2068027336"/>
         <c:scaling>
           <c:orientation val="minMax"/>
         </c:scaling>
@@ -1155,7 +1151,7 @@
             </a:pPr>
           </a:p>
         </c:txPr>
-        <c:crossAx val="-2113994440"/>
+        <c:crossAx val="2113994440"/>
         <c:crosses val="autoZero"/>
         <c:auto val="1"/>
         <c:lblAlgn val="ctr"/>
@@ -1163,7 +1159,7 @@
         <c:noMultiLvlLbl val="0"/>
       </c:catAx>
       <c:valAx>
-        <c:axId val="-2113994440"/>
+        <c:axId val="2113994440"/>
         <c:scaling/>
         <c:delete/>
         <c:axPos val="b"/>
@@ -1198,7 +1194,7 @@
             </a:pPr>
           </a:p>
         </c:txPr>
-        <c:crossAx val="-2068027336"/>
+        <c:crossAx val="2068027336"/>
         <c:crosses val="autoZero"/>
       </c:valAx>
     </c:plotArea>
@@ -1537,11 +1533,11 @@
         </c:dLbls>
         <c:gapWidth val="60"/>
         <c:overlap val="100"/>
-        <c:axId val="-2068027336"/>
-        <c:axId val="-2113994440"/>
+        <c:axId val="2068027336"/>
+        <c:axId val="2113994440"/>
       </c:barChart>
       <c:catAx>
-        <c:axId val="-2068027336"/>
+        <c:axId val="2068027336"/>
         <c:scaling>
           <c:orientation val="minMax"/>
         </c:scaling>
@@ -1571,7 +1567,7 @@
             </a:pPr>
           </a:p>
         </c:txPr>
-        <c:crossAx val="-2113994440"/>
+        <c:crossAx val="2113994440"/>
         <c:crosses val="autoZero"/>
         <c:auto val="1"/>
         <c:lblAlgn val="ctr"/>
@@ -1579,7 +1575,7 @@
         <c:noMultiLvlLbl val="0"/>
       </c:catAx>
       <c:valAx>
-        <c:axId val="-2113994440"/>
+        <c:axId val="2113994440"/>
         <c:scaling/>
         <c:delete/>
         <c:axPos val="l"/>
@@ -1614,7 +1610,7 @@
             </a:pPr>
           </a:p>
         </c:txPr>
-        <c:crossAx val="-2068027336"/>
+        <c:crossAx val="2068027336"/>
         <c:crosses val="autoZero"/>
       </c:valAx>
     </c:plotArea>
@@ -1727,7 +1723,6 @@
                   </a:pPr>
                 </a:p>
               </c:txPr>
-              <c:dLblPos val="ctr"/>
               <c:showLegendKey val="0"/>
               <c:showVal val="1"/>
               <c:showCatName val="0"/>
@@ -1752,7 +1747,6 @@
                   </a:pPr>
                 </a:p>
               </c:txPr>
-              <c:dLblPos val="ctr"/>
               <c:showLegendKey val="0"/>
               <c:showVal val="1"/>
               <c:showCatName val="0"/>
@@ -1814,9 +1808,8 @@
               </a:pPr>
             </a:p>
           </c:txPr>
-          <c:dLblPos val="ctr"/>
           <c:showLegendKey val="0"/>
-          <c:showVal val="0"/>
+          <c:showVal val="1"/>
           <c:showCatName val="0"/>
           <c:showSerName val="0"/>
           <c:showPercent val="0"/>
@@ -2040,11 +2033,11 @@
           <c:showLeaderLines val="1"/>
         </c:dLbls>
         <c:gapWidth val="60"/>
-        <c:axId val="-2068027336"/>
-        <c:axId val="-2113994440"/>
+        <c:axId val="2068027336"/>
+        <c:axId val="2113994440"/>
       </c:barChart>
       <c:catAx>
-        <c:axId val="-2068027336"/>
+        <c:axId val="2068027336"/>
         <c:scaling>
           <c:orientation val="minMax"/>
         </c:scaling>
@@ -2074,7 +2067,7 @@
             </a:pPr>
           </a:p>
         </c:txPr>
-        <c:crossAx val="-2113994440"/>
+        <c:crossAx val="2113994440"/>
         <c:crosses val="autoZero"/>
         <c:auto val="1"/>
         <c:lblAlgn val="ctr"/>
@@ -2082,7 +2075,7 @@
         <c:noMultiLvlLbl val="0"/>
       </c:catAx>
       <c:valAx>
-        <c:axId val="-2113994440"/>
+        <c:axId val="2113994440"/>
         <c:scaling/>
         <c:delete/>
         <c:axPos val="l"/>
@@ -2117,7 +2110,7 @@
             </a:pPr>
           </a:p>
         </c:txPr>
-        <c:crossAx val="-2068027336"/>
+        <c:crossAx val="2068027336"/>
         <c:crosses val="autoZero"/>
       </c:valAx>
     </c:plotArea>
@@ -2252,11 +2245,11 @@
           <c:showLeaderLines val="1"/>
         </c:dLbls>
         <c:gapWidth val="60"/>
-        <c:axId val="-2068027336"/>
-        <c:axId val="-2113994440"/>
+        <c:axId val="2068027336"/>
+        <c:axId val="2113994440"/>
       </c:barChart>
       <c:catAx>
-        <c:axId val="-2068027336"/>
+        <c:axId val="2068027336"/>
         <c:scaling>
           <c:orientation val="minMax"/>
         </c:scaling>
@@ -2286,7 +2279,7 @@
             </a:pPr>
           </a:p>
         </c:txPr>
-        <c:crossAx val="-2113994440"/>
+        <c:crossAx val="2113994440"/>
         <c:crosses val="autoZero"/>
         <c:auto val="1"/>
         <c:lblAlgn val="ctr"/>
@@ -2294,7 +2287,7 @@
         <c:noMultiLvlLbl val="0"/>
       </c:catAx>
       <c:valAx>
-        <c:axId val="-2113994440"/>
+        <c:axId val="2113994440"/>
         <c:scaling/>
         <c:delete/>
         <c:axPos val="l"/>
@@ -2329,7 +2322,7 @@
             </a:pPr>
           </a:p>
         </c:txPr>
-        <c:crossAx val="-2068027336"/>
+        <c:crossAx val="2068027336"/>
         <c:crosses val="autoZero"/>
       </c:valAx>
     </c:plotArea>
@@ -2688,11 +2681,11 @@
           <c:showLeaderLines val="1"/>
         </c:dLbls>
         <c:gapWidth val="60"/>
-        <c:axId val="-2068027336"/>
-        <c:axId val="-2113994440"/>
+        <c:axId val="2068027336"/>
+        <c:axId val="2113994440"/>
       </c:barChart>
       <c:catAx>
-        <c:axId val="-2068027336"/>
+        <c:axId val="2068027336"/>
         <c:scaling>
           <c:orientation val="minMax"/>
         </c:scaling>
@@ -2722,7 +2715,7 @@
             </a:pPr>
           </a:p>
         </c:txPr>
-        <c:crossAx val="-2113994440"/>
+        <c:crossAx val="2113994440"/>
         <c:crosses val="autoZero"/>
         <c:auto val="1"/>
         <c:lblAlgn val="ctr"/>
@@ -2730,7 +2723,7 @@
         <c:noMultiLvlLbl val="0"/>
       </c:catAx>
       <c:valAx>
-        <c:axId val="-2113994440"/>
+        <c:axId val="2113994440"/>
         <c:scaling/>
         <c:delete/>
         <c:axPos val="l"/>
@@ -2765,7 +2758,7 @@
             </a:pPr>
           </a:p>
         </c:txPr>
-        <c:crossAx val="-2068027336"/>
+        <c:crossAx val="2068027336"/>
         <c:crosses val="autoZero"/>
       </c:valAx>
     </c:plotArea>
@@ -2888,11 +2881,11 @@
           <c:showLeaderLines val="1"/>
         </c:dLbls>
         <c:gapWidth val="60"/>
-        <c:axId val="-2068027336"/>
-        <c:axId val="-2113994440"/>
+        <c:axId val="2068027336"/>
+        <c:axId val="2113994440"/>
       </c:barChart>
       <c:catAx>
-        <c:axId val="-2068027336"/>
+        <c:axId val="2068027336"/>
         <c:scaling>
           <c:orientation val="minMax"/>
         </c:scaling>
@@ -2922,7 +2915,7 @@
             </a:pPr>
           </a:p>
         </c:txPr>
-        <c:crossAx val="-2113994440"/>
+        <c:crossAx val="2113994440"/>
         <c:crosses val="autoZero"/>
         <c:auto val="1"/>
         <c:lblAlgn val="ctr"/>
@@ -2930,7 +2923,7 @@
         <c:noMultiLvlLbl val="0"/>
       </c:catAx>
       <c:valAx>
-        <c:axId val="-2113994440"/>
+        <c:axId val="2113994440"/>
         <c:scaling/>
         <c:delete/>
         <c:axPos val="l"/>
@@ -2965,7 +2958,7 @@
             </a:pPr>
           </a:p>
         </c:txPr>
-        <c:crossAx val="-2068027336"/>
+        <c:crossAx val="2068027336"/>
         <c:crosses val="autoZero"/>
       </c:valAx>
     </c:plotArea>
@@ -3082,11 +3075,11 @@
           <c:showLeaderLines val="1"/>
         </c:dLbls>
         <c:gapWidth val="60"/>
-        <c:axId val="-2068027336"/>
-        <c:axId val="-2113994440"/>
+        <c:axId val="2068027336"/>
+        <c:axId val="2113994440"/>
       </c:barChart>
       <c:catAx>
-        <c:axId val="-2068027336"/>
+        <c:axId val="2068027336"/>
         <c:scaling>
           <c:orientation val="minMax"/>
         </c:scaling>
@@ -3116,7 +3109,7 @@
             </a:pPr>
           </a:p>
         </c:txPr>
-        <c:crossAx val="-2113994440"/>
+        <c:crossAx val="2113994440"/>
         <c:crosses val="autoZero"/>
         <c:auto val="1"/>
         <c:lblAlgn val="ctr"/>
@@ -3124,7 +3117,7 @@
         <c:noMultiLvlLbl val="0"/>
       </c:catAx>
       <c:valAx>
-        <c:axId val="-2113994440"/>
+        <c:axId val="2113994440"/>
         <c:scaling/>
         <c:delete/>
         <c:axPos val="l"/>
@@ -3159,7 +3152,7 @@
             </a:pPr>
           </a:p>
         </c:txPr>
-        <c:crossAx val="-2068027336"/>
+        <c:crossAx val="2068027336"/>
         <c:crosses val="autoZero"/>
       </c:valAx>
     </c:plotArea>
@@ -3282,11 +3275,11 @@
           <c:showLeaderLines val="1"/>
         </c:dLbls>
         <c:gapWidth val="60"/>
-        <c:axId val="-2068027336"/>
-        <c:axId val="-2113994440"/>
+        <c:axId val="2068027336"/>
+        <c:axId val="2113994440"/>
       </c:barChart>
       <c:catAx>
-        <c:axId val="-2068027336"/>
+        <c:axId val="2068027336"/>
         <c:scaling>
           <c:orientation val="minMax"/>
         </c:scaling>
@@ -3316,7 +3309,7 @@
             </a:pPr>
           </a:p>
         </c:txPr>
-        <c:crossAx val="-2113994440"/>
+        <c:crossAx val="2113994440"/>
         <c:crosses val="autoZero"/>
         <c:auto val="1"/>
         <c:lblAlgn val="ctr"/>
@@ -3324,7 +3317,7 @@
         <c:noMultiLvlLbl val="0"/>
       </c:catAx>
       <c:valAx>
-        <c:axId val="-2113994440"/>
+        <c:axId val="2113994440"/>
         <c:scaling/>
         <c:delete/>
         <c:axPos val="l"/>
@@ -3359,7 +3352,7 @@
             </a:pPr>
           </a:p>
         </c:txPr>
-        <c:crossAx val="-2068027336"/>
+        <c:crossAx val="2068027336"/>
         <c:crosses val="autoZero"/>
       </c:valAx>
     </c:plotArea>
@@ -7022,7 +7015,7 @@
       </p:sp>
       <p:graphicFrame>
         <p:nvGraphicFramePr>
-          <p:cNvPr id="6" name="Chart 5"/>
+          <p:cNvPr id="6" name="Chart 5" descr="Doughnut chart. TTM segment EBITDA: Aerospace Products 848; Aviation Leasing 489."/>
           <p:cNvGraphicFramePr>
             <a:graphicFrameLocks noGrp="1"/>
           </p:cNvGraphicFramePr>
@@ -8913,7 +8906,7 @@
       </p:sp>
       <p:graphicFrame>
         <p:nvGraphicFramePr>
-          <p:cNvPr id="8" name="Chart 7"/>
+          <p:cNvPr id="8" name="Chart 7" descr="Column chart. Total Adj. EBITDA: FY23 597; FY24 862; FY25 1,191; 2026E 1,332; 2027 Plan 2,150. Aerospace Products: FY23 160; FY24 381; FY25 671; 2026E 1,050; 2027 Plan 1,400."/>
           <p:cNvGraphicFramePr>
             <a:graphicFrameLocks noGrp="1"/>
           </p:cNvGraphicFramePr>
@@ -9373,7 +9366,7 @@
       </p:sp>
       <p:graphicFrame>
         <p:nvGraphicFramePr>
-          <p:cNvPr id="4" name="Chart 3"/>
+          <p:cNvPr id="4" name="Chart 3" descr="Column chart. Modules: 2023 178; 2025 757; 2026 Target 1,200."/>
           <p:cNvGraphicFramePr>
             <a:graphicFrameLocks noGrp="1"/>
           </p:cNvGraphicFramePr>
@@ -9583,7 +9576,7 @@
       </p:sp>
       <p:graphicFrame>
         <p:nvGraphicFramePr>
-          <p:cNvPr id="9" name="Chart 8"/>
+          <p:cNvPr id="9" name="Chart 8" descr="Line chart. AP EBITDA margin: FY2025 34.7; Q4'25 35; Q1'26 29.9; Q2'26 28.5."/>
           <p:cNvGraphicFramePr>
             <a:graphicFrameLocks noGrp="1"/>
           </p:cNvGraphicFramePr>
@@ -12271,7 +12264,7 @@
       </p:sp>
       <p:graphicFrame>
         <p:nvGraphicFramePr>
-          <p:cNvPr id="5" name="Chart 4"/>
+          <p:cNvPr id="5" name="Chart 4" descr="Column chart: Quarterly Dividend per Share ($). Dividend per share: Q2'25 0.3; Q3'25 0.35; Q4'25 0.4; Q1'26 0.45; Q2'26 0.5."/>
           <p:cNvGraphicFramePr>
             <a:graphicFrameLocks noGrp="1"/>
           </p:cNvGraphicFramePr>
@@ -14309,7 +14302,7 @@
       </p:sp>
       <p:graphicFrame>
         <p:nvGraphicFramePr>
-          <p:cNvPr id="8" name="Chart 7"/>
+          <p:cNvPr id="8" name="Chart 7" descr="Column chart. Retirement assumption: 2025 view 3.5; Jan 2026 2.5; Mid-2026 2; Sep 2026 1.75."/>
           <p:cNvGraphicFramePr>
             <a:graphicFrameLocks noGrp="1"/>
           </p:cNvGraphicFramePr>
@@ -16086,7 +16079,7 @@
       </p:sp>
       <p:graphicFrame>
         <p:nvGraphicFramePr>
-          <p:cNvPr id="6" name="Chart 5"/>
+          <p:cNvPr id="6" name="Chart 5" descr="Column chart. Adj. EBITDA margin: FTAI Aerospace Products 34.7; StandardAero 13.3; AerSale 13.7."/>
           <p:cNvGraphicFramePr>
             <a:graphicFrameLocks noGrp="1"/>
           </p:cNvGraphicFramePr>
@@ -17931,7 +17924,7 @@
       </p:sp>
       <p:graphicFrame>
         <p:nvGraphicFramePr>
-          <p:cNvPr id="8" name="Chart 7"/>
+          <p:cNvPr id="8" name="Chart 7" descr="Column chart. 2027 Power EBITDA: Bear (S3) 300; Plan 450; Bull (L2) 600; Release high 750."/>
           <p:cNvGraphicFramePr>
             <a:graphicFrameLocks noGrp="1"/>
           </p:cNvGraphicFramePr>
@@ -19591,7 +19584,7 @@
       </p:sp>
       <p:graphicFrame>
         <p:nvGraphicFramePr>
-          <p:cNvPr id="8" name="Chart 7"/>
+          <p:cNvPr id="8" name="Chart 7" descr="Doughnut chart. Q2'26 Leasing EBITDA ($M): Balance-sheet leasing + gains 48; SCI fees + co-invest 35; Insurance recoveries 5."/>
           <p:cNvGraphicFramePr>
             <a:graphicFrameLocks noGrp="1"/>
           </p:cNvGraphicFramePr>
@@ -20245,7 +20238,7 @@
       </p:sp>
       <p:graphicFrame>
         <p:nvGraphicFramePr>
-          <p:cNvPr id="4" name="Chart 3"/>
+          <p:cNvPr id="4" name="Chart 3" descr="Stacked column chart. Implied by $167 price: WACC 8.5% 0.4; WACC 9% 0.9; WACC 10% (base) 1.9; WACC 11% 2.9. Implied by $316 mean target (10% WACC): Street target 5.4."/>
           <p:cNvGraphicFramePr>
             <a:graphicFrameLocks noGrp="1"/>
           </p:cNvGraphicFramePr>
@@ -23363,7 +23356,7 @@
       </p:sp>
       <p:graphicFrame>
         <p:nvGraphicFramePr>
-          <p:cNvPr id="6" name="Chart 5"/>
+          <p:cNvPr id="6" name="Chart 5" descr="Bar chart. Value per share: Leasing +/-1x 4; AP margin +/-1pp 4; AP EBITDA +/-$100M 9; Power +/-$150M 14; WACC +/-1pp 25; Post-2027 growth +/-1pp 25."/>
           <p:cNvGraphicFramePr>
             <a:graphicFrameLocks noGrp="1"/>
           </p:cNvGraphicFramePr>
@@ -23943,7 +23936,7 @@
       </p:sp>
       <p:graphicFrame>
         <p:nvGraphicFramePr>
-          <p:cNvPr id="4" name="Chart 3"/>
+          <p:cNvPr id="4" name="Chart 3" descr="Stacked column chart. Scenario value: Bear (30%) 89; Base (45%) 172; Bull (25%) 306. Probability-weighted: Weighted 181. Price today: Price today 167."/>
           <p:cNvGraphicFramePr>
             <a:graphicFrameLocks noGrp="1"/>
           </p:cNvGraphicFramePr>
@@ -33000,7 +32993,7 @@
       </p:sp>
       <p:graphicFrame>
         <p:nvGraphicFramePr>
-          <p:cNvPr id="6" name="Chart 5"/>
+          <p:cNvPr id="6" name="Chart 5" descr="Column chart. Bear (13.7 / 20): Edge 3.4; Materiality 2.4; Testability 4.6; Evidence 3.3. Bull (12.1 / 20): Edge 2.7; Materiality 2; Testability 4.3; Evidence 3.1."/>
           <p:cNvGraphicFramePr>
             <a:graphicFrameLocks noGrp="1"/>
           </p:cNvGraphicFramePr>
